--- a/docs/KG_Academy_Analisis_de_Despliegue.pptx
+++ b/docs/KG_Academy_Analisis_de_Despliegue.pptx
@@ -3294,7 +3294,7 @@
                 </a:solidFill>
                 <a:latin typeface="Segoe UI"/>
               </a:rPr>
-              <a:t>ANALISIS TECNICO  ·  VERSION 1.0</a:t>
+              <a:t>ANÁLISIS TÉCNICO  ·  VERSIÓN 1.0</a:t>
             </a:r>
           </a:p>
         </p:txBody>
@@ -3355,7 +3355,7 @@
                 </a:solidFill>
                 <a:latin typeface="Segoe UI"/>
               </a:rPr>
-              <a:t>KG Academy en produccion</a:t>
+              <a:t>KG Academy en producción</a:t>
             </a:r>
           </a:p>
         </p:txBody>
@@ -3441,7 +3441,7 @@
                 </a:solidFill>
                 <a:latin typeface="Segoe UI"/>
               </a:rPr>
-              <a:t>Comparacion de seis alternativas de alojamiento con costos, riesgos y esfuerzo de administracion, una recomendacion argumentada y el plan de puesta en produccion paso a paso.</a:t>
+              <a:t>Comparacion de seis alternativas de alojamiento con costos, riesgos y esfuerzo de administración, una recomendación argumentada y el plan de puesta en producción paso a paso.</a:t>
             </a:r>
           </a:p>
         </p:txBody>
@@ -3483,7 +3483,7 @@
                 </a:solidFill>
                 <a:latin typeface="Segoe UI"/>
               </a:rPr>
-              <a:t>KG GESTION INTEGRAL S.A.S.  ·  KATERINE GUANARITA</a:t>
+              <a:t>KG GESTIÓN INTEGRAL S.A.S.  ·  KATERINE GUAÑARITA</a:t>
             </a:r>
           </a:p>
           <a:p>
@@ -3502,7 +3502,7 @@
                 </a:solidFill>
                 <a:latin typeface="Segoe UI"/>
               </a:rPr>
-              <a:t>Realizado por Diego Alejandro Hernandez Blanco</a:t>
+              <a:t>Realizado por Diego Alejandro Hernández Blanco</a:t>
             </a:r>
           </a:p>
           <a:p>
@@ -3521,7 +3521,7 @@
                 </a:solidFill>
                 <a:latin typeface="Segoe UI"/>
               </a:rPr>
-              <a:t>Bogota D.C., Colombia  ·  2026</a:t>
+              <a:t>Bogotá D.C., Colombia  ·  2026</a:t>
             </a:r>
           </a:p>
         </p:txBody>
@@ -3712,7 +3712,7 @@
                 </a:solidFill>
                 <a:latin typeface="Segoe UI"/>
               </a:rPr>
-              <a:t>Plan de puesta en produccion</a:t>
+              <a:t>Plan de puesta en producción</a:t>
             </a:r>
           </a:p>
           <a:p>
@@ -3731,7 +3731,7 @@
                 </a:solidFill>
                 <a:latin typeface="Segoe UI"/>
               </a:rPr>
-              <a:t>Doce pasos. Un dia de trabajo tecnico si el dominio ya esta disponible.</a:t>
+              <a:t>Doce pasos. Un día de trabajo técnico si el dominio ya está disponible.</a:t>
             </a:r>
           </a:p>
         </p:txBody>
@@ -3773,7 +3773,7 @@
                 </a:solidFill>
                 <a:latin typeface="Segoe UI"/>
               </a:rPr>
-              <a:t>KG Academy  ·  KG Gestion Integral S.A.S.  ·  Desarrollado por Diego Alejandro Hernandez Blanco</a:t>
+              <a:t>KG Academy  ·  KG Gestión Integral S.A.S.  ·  Desarrollado por Diego Alejandro Hernández Blanco</a:t>
             </a:r>
           </a:p>
         </p:txBody>
@@ -4606,7 +4606,7 @@
                 </a:solidFill>
                 <a:latin typeface="Segoe UI"/>
               </a:rPr>
-              <a:t>Subir el codigo</a:t>
+              <a:t>Subir el código</a:t>
             </a:r>
           </a:p>
           <a:p>
@@ -5092,7 +5092,7 @@
                 </a:solidFill>
                 <a:latin typeface="Segoe UI"/>
               </a:rPr>
-              <a:t>Cargar los catalogos</a:t>
+              <a:t>Cargar los catálogos</a:t>
             </a:r>
           </a:p>
           <a:p>
@@ -5111,7 +5111,7 @@
                 </a:solidFill>
                 <a:latin typeface="Segoe UI"/>
               </a:rPr>
-              <a:t>Roles, permisos, plantillas y configuracion. NO el seed de demostracion.</a:t>
+              <a:t>Roles, permisos, plantillas y configuración. NO el seed de demostración.</a:t>
             </a:r>
           </a:p>
         </p:txBody>
@@ -5273,7 +5273,7 @@
                 </a:solidFill>
                 <a:latin typeface="Segoe UI"/>
               </a:rPr>
-              <a:t>npm run build y arrancar con PM2 con reinicio automatico.</a:t>
+              <a:t>npm run build y arrancar con PM2 con reinicio automático.</a:t>
             </a:r>
           </a:p>
         </p:txBody>
@@ -5759,7 +5759,7 @@
                 </a:solidFill>
                 <a:latin typeface="Segoe UI"/>
               </a:rPr>
-              <a:t>Ingreso por cada rol, aula, evaluacion, certificado y QR con el dominio real.</a:t>
+              <a:t>Ingreso por cada rol, aula, evaluación, certificado y QR con el dominio real.</a:t>
             </a:r>
           </a:p>
         </p:txBody>
@@ -5849,7 +5849,7 @@
                 </a:solidFill>
                 <a:latin typeface="Segoe UI"/>
               </a:rPr>
-              <a:t>Paso 8, critico: el seed actual BORRA la base antes de sembrar. En produccion debe ejecutarse solo la parte de catalogos, nunca el seed completo despues del lanzamiento.</a:t>
+              <a:t>Paso 8, critico: el seed actual BORRA la base antes de sembrar. En producción debe ejecutarse solo la parte de catálogos, nunca el seed completo después del lanzamiento.</a:t>
             </a:r>
           </a:p>
         </p:txBody>
@@ -6059,7 +6059,7 @@
                 </a:solidFill>
                 <a:latin typeface="Segoe UI"/>
               </a:rPr>
-              <a:t>Errores frecuentes en el paso a produccion, y como evitarlos en este proyecto concreto.</a:t>
+              <a:t>Errores frecuentes en el paso a producción, y como evitarlos en este proyecto concreto.</a:t>
             </a:r>
           </a:p>
         </p:txBody>
@@ -6101,7 +6101,7 @@
                 </a:solidFill>
                 <a:latin typeface="Segoe UI"/>
               </a:rPr>
-              <a:t>KG Academy  ·  KG Gestion Integral S.A.S.  ·  Desarrollado por Diego Alejandro Hernandez Blanco</a:t>
+              <a:t>KG Academy  ·  KG Gestión Integral S.A.S.  ·  Desarrollado por Diego Alejandro Hernández Blanco</a:t>
             </a:r>
           </a:p>
         </p:txBody>
@@ -6296,7 +6296,7 @@
                 </a:solidFill>
                 <a:latin typeface="Segoe UI"/>
               </a:rPr>
-              <a:t>Si NEXT_PUBLIC_APP_URL no tiene el dominio definitivo ANTES de emitir el primer certificado, los QR quedaran apuntando a localhost y habra que reemitirlos.</a:t>
+              <a:t>Si NEXT_PUBLIC_APP_URL no tiene el dominio definitivo ANTES de emitir el primer certificado, los QR quedaran apuntando a localhost y habrá que reemitirlos.</a:t>
             </a:r>
           </a:p>
         </p:txBody>
@@ -6430,7 +6430,7 @@
                 </a:solidFill>
                 <a:latin typeface="Segoe UI"/>
               </a:rPr>
-              <a:t>La clave de sesion por defecto</a:t>
+              <a:t>La clave de sesión por defecto</a:t>
             </a:r>
           </a:p>
           <a:p>
@@ -6449,7 +6449,7 @@
                 </a:solidFill>
                 <a:latin typeface="Segoe UI"/>
               </a:rPr>
-              <a:t>AUTH_SECRET debe cambiarse por una cadena larga y aleatoria. Con la clave de ejemplo, cualquiera podria falsificar una sesion.</a:t>
+              <a:t>AUTH_SECRET debe cambiarse por una cadena larga y aleatoria. Con la clave de ejemplo, cualquiera podria falsificar una sesión.</a:t>
             </a:r>
           </a:p>
         </p:txBody>
@@ -6583,7 +6583,7 @@
                 </a:solidFill>
                 <a:latin typeface="Segoe UI"/>
               </a:rPr>
-              <a:t>Ejecutar el seed en produccion</a:t>
+              <a:t>Ejecutar el seed en producción</a:t>
             </a:r>
           </a:p>
           <a:p>
@@ -6755,7 +6755,7 @@
                 </a:solidFill>
                 <a:latin typeface="Segoe UI"/>
               </a:rPr>
-              <a:t>Todo cambio deberia probarse en un subdominio de staging antes de tocar produccion. Un segundo VPS pequeno o un subdominio en el mismo servidor.</a:t>
+              <a:t>Todo cambio deberia probarse en un subdominio de staging antes de tocar producción. Un segundo VPS pequeño o un subdominio en el mismo servidor.</a:t>
             </a:r>
           </a:p>
         </p:txBody>
@@ -6908,7 +6908,7 @@
                 </a:solidFill>
                 <a:latin typeface="Segoe UI"/>
               </a:rPr>
-              <a:t>Configurar el servidor en America/Bogota para que las fechas de los certificados y los vencimientos coincidan con la realidad.</a:t>
+              <a:t>Configurar el servidor en America/Bogotá para que las fechas de los certificados y los vencimientos coincidan con la realidad.</a:t>
             </a:r>
           </a:p>
         </p:txBody>
@@ -7252,7 +7252,7 @@
                 </a:solidFill>
                 <a:latin typeface="Segoe UI"/>
               </a:rPr>
-              <a:t>Que hacer cuando la plataforma crezca</a:t>
+              <a:t>Qué hacer cuando la plataforma crezca</a:t>
             </a:r>
           </a:p>
           <a:p>
@@ -7271,7 +7271,7 @@
                 </a:solidFill>
                 <a:latin typeface="Segoe UI"/>
               </a:rPr>
-              <a:t>Senales concretas para saber cuando conviene cambiar de escalon, y a que escalon pasar.</a:t>
+              <a:t>Señales concretas para saber cuando conviene cambiar de escalon, y a que escalon pasar.</a:t>
             </a:r>
           </a:p>
         </p:txBody>
@@ -7313,7 +7313,7 @@
                 </a:solidFill>
                 <a:latin typeface="Segoe UI"/>
               </a:rPr>
-              <a:t>KG Academy  ·  KG Gestion Integral S.A.S.  ·  Desarrollado por Diego Alejandro Hernandez Blanco</a:t>
+              <a:t>KG Academy  ·  KG Gestión Integral S.A.S.  ·  Desarrollado por Diego Alejandro Hernández Blanco</a:t>
             </a:r>
           </a:p>
         </p:txBody>
@@ -7544,7 +7544,7 @@
                 </a:solidFill>
                 <a:latin typeface="Segoe UI"/>
               </a:rPr>
-              <a:t>Un VPS con la aplicacion y PostgreSQL juntos</a:t>
+              <a:t>Un VPS con la aplicación y PostgreSQL juntos</a:t>
             </a:r>
           </a:p>
         </p:txBody>
@@ -7716,7 +7716,7 @@
                 </a:solidFill>
                 <a:latin typeface="Segoe UI"/>
               </a:rPr>
-              <a:t>Monitoreo basico</a:t>
+              <a:t>Monitoreo básico</a:t>
             </a:r>
           </a:p>
         </p:txBody>
@@ -7905,7 +7905,7 @@
                 </a:solidFill>
                 <a:latin typeface="Segoe UI"/>
               </a:rPr>
-              <a:t>SENAL DE CAMBIO</a:t>
+              <a:t>SEÑAL DE CAMBIO</a:t>
             </a:r>
           </a:p>
         </p:txBody>
@@ -8077,7 +8077,7 @@
                 </a:solidFill>
                 <a:latin typeface="Segoe UI"/>
               </a:rPr>
-              <a:t>Las paginas tardan mas de 2 segundos</a:t>
+              <a:t>Las páginas tardan más de 2 segundos</a:t>
             </a:r>
           </a:p>
         </p:txBody>
@@ -8163,7 +8163,7 @@
                 </a:solidFill>
                 <a:latin typeface="Segoe UI"/>
               </a:rPr>
-              <a:t>Mas de 100 usuarios simultaneos</a:t>
+              <a:t>Más de 100 usuarios simultaneos</a:t>
             </a:r>
           </a:p>
         </p:txBody>
@@ -8610,7 +8610,7 @@
                 </a:solidFill>
                 <a:latin typeface="Segoe UI"/>
               </a:rPr>
-              <a:t>Agregar una CDN para los archivos estaticos</a:t>
+              <a:t>Agregar una CDN para los archivos estáticos</a:t>
             </a:r>
           </a:p>
         </p:txBody>
@@ -8885,7 +8885,7 @@
                 </a:solidFill>
                 <a:latin typeface="Segoe UI"/>
               </a:rPr>
-              <a:t>Dos servidores de aplicacion detras de un balanceador</a:t>
+              <a:t>Dos servidores de aplicación detras de un balanceador</a:t>
             </a:r>
           </a:p>
         </p:txBody>
@@ -9233,7 +9233,7 @@
                 </a:solidFill>
                 <a:latin typeface="Segoe UI"/>
               </a:rPr>
-              <a:t>La arquitectura elegida permite subir de escalon sin reescribir nada: el mismo codigo funciona en un VPS pequeno y en una infraestructura con balanceador.</a:t>
+              <a:t>La arquitectura elegida permite subir de escalon sin reescribir nada: el mismo código funciona en un VPS pequeño y en una infraestructura con balanceador.</a:t>
             </a:r>
           </a:p>
         </p:txBody>
@@ -9424,7 +9424,7 @@
                 </a:solidFill>
                 <a:latin typeface="Segoe UI"/>
               </a:rPr>
-              <a:t>La recomendacion en una lamina</a:t>
+              <a:t>La recomendación en una lamina</a:t>
             </a:r>
           </a:p>
           <a:p>
@@ -9485,7 +9485,7 @@
                 </a:solidFill>
                 <a:latin typeface="Segoe UI"/>
               </a:rPr>
-              <a:t>KG Academy  ·  KG Gestion Integral S.A.S.  ·  Desarrollado por Diego Alejandro Hernandez Blanco</a:t>
+              <a:t>KG Academy  ·  KG Gestión Integral S.A.S.  ·  Desarrollado por Diego Alejandro Hernández Blanco</a:t>
             </a:r>
           </a:p>
         </p:txBody>
@@ -9615,7 +9615,7 @@
                 </a:solidFill>
                 <a:latin typeface="Segoe UI"/>
               </a:rPr>
-              <a:t>RECOMENDACION</a:t>
+              <a:t>RECOMENDACIÓN</a:t>
             </a:r>
           </a:p>
           <a:p>
@@ -9653,7 +9653,7 @@
                 </a:solidFill>
                 <a:latin typeface="Segoe UI"/>
               </a:rPr>
-              <a:t>Aproximadamente US$ 10 a 34 al mes, cumple el requisito del documento funcional y no ata la plataforma a ningun proveedor.</a:t>
+              <a:t>Aproximadamente US$ 10 a 34 al mes, cumple el requisito del documento funcional y no ata la plataforma a ningún proveedor.</a:t>
             </a:r>
           </a:p>
         </p:txBody>
@@ -9815,7 +9815,7 @@
                 </a:solidFill>
                 <a:latin typeface="Segoe UI"/>
               </a:rPr>
-              <a:t>Ejecuta Next.js con renderizado en servidor y PostgreSQL, que es lo que la aplicacion necesita.</a:t>
+              <a:t>Ejecuta Next.js con renderizado en servidor y PostgreSQL, que es lo que la aplicación necesita.</a:t>
             </a:r>
           </a:p>
         </p:txBody>
@@ -9977,7 +9977,7 @@
                 </a:solidFill>
                 <a:latin typeface="Segoe UI"/>
               </a:rPr>
-              <a:t>La opcion mas barata entre las que realmente funcionan.</a:t>
+              <a:t>La opcion más barata entre las que realmente funcionan.</a:t>
             </a:r>
           </a:p>
         </p:txBody>
@@ -10301,7 +10301,7 @@
                 </a:solidFill>
                 <a:latin typeface="Segoe UI"/>
               </a:rPr>
-              <a:t>Si manana KG quiere migrar, el mismo codigo corre en cualquier otro VPS o en Vercel.</a:t>
+              <a:t>Si mañana KG quiere migrar, el mismo código corre en cualquier otro VPS o en Vercel.</a:t>
             </a:r>
           </a:p>
         </p:txBody>
@@ -10463,7 +10463,7 @@
                 </a:solidFill>
                 <a:latin typeface="Segoe UI"/>
               </a:rPr>
-              <a:t>2 vCPU y 8 GB cubren de sobra el primer ano de operacion.</a:t>
+              <a:t>2 vCPU y 8 GB cubren de sobra el primer año de operacion.</a:t>
             </a:r>
           </a:p>
         </p:txBody>
@@ -10925,7 +10925,7 @@
                 </a:solidFill>
                 <a:latin typeface="Segoe UI"/>
               </a:rPr>
-              <a:t>KG GESTION INTEGRAL S.A.S.  ·  KATERINE GUANARITA</a:t>
+              <a:t>KG GESTIÓN INTEGRAL S.A.S.  ·  KATERINE GUAÑARITA</a:t>
             </a:r>
           </a:p>
         </p:txBody>
@@ -11013,7 +11013,7 @@
                 </a:solidFill>
                 <a:latin typeface="Segoe UI"/>
               </a:rPr>
-              <a:t>Disenado y desarrollado por Diego Alejandro Hernandez Blanco</a:t>
+              <a:t>Diseñado y desarrollado por Diego Alejandro Hernández Blanco</a:t>
             </a:r>
           </a:p>
         </p:txBody>
@@ -11204,7 +11204,7 @@
                 </a:solidFill>
                 <a:latin typeface="Segoe UI"/>
               </a:rPr>
-              <a:t>Que necesita esta aplicacion para funcionar</a:t>
+              <a:t>Que necesita esta aplicación para funcionar</a:t>
             </a:r>
           </a:p>
           <a:p>
@@ -11265,7 +11265,7 @@
                 </a:solidFill>
                 <a:latin typeface="Segoe UI"/>
               </a:rPr>
-              <a:t>KG Academy  ·  KG Gestion Integral S.A.S.  ·  Desarrollado por Diego Alejandro Hernandez Blanco</a:t>
+              <a:t>KG Academy  ·  KG Gestión Integral S.A.S.  ·  Desarrollado por Diego Alejandro Hernández Blanco</a:t>
             </a:r>
           </a:p>
         </p:txBody>
@@ -11613,7 +11613,7 @@
                 </a:solidFill>
                 <a:latin typeface="Segoe UI"/>
               </a:rPr>
-              <a:t>Relacional, con 44 tablas e integridad referencial. MySQL tambien serviria, pero PostgreSQL es la eleccion recomendada.</a:t>
+              <a:t>Relacional, con 44 tablas e integridad referencial. MySQL también serviria, pero PostgreSQL es la eleccion recomendada.</a:t>
             </a:r>
           </a:p>
         </p:txBody>
@@ -11766,7 +11766,7 @@
                 </a:solidFill>
                 <a:latin typeface="Segoe UI"/>
               </a:rPr>
-              <a:t>Las cookies de sesion y los codigos QR de los certificados dependen del dominio definitivo. Sin SSL no hay plataforma.</a:t>
+              <a:t>Las cookies de sesión y los códigos QR de los certificados dependen del dominio definitivo. Sin SSL no hay plataforma.</a:t>
             </a:r>
           </a:p>
         </p:txBody>
@@ -11919,7 +11919,7 @@
                 </a:solidFill>
                 <a:latin typeface="Segoe UI"/>
               </a:rPr>
-              <a:t>El video NO debe servirse desde el servidor de la aplicacion: consume todo el ancho de banda y degrada la plataforma.</a:t>
+              <a:t>El video NO debe servirse desde el servidor de la aplicación: consume todo el ancho de banda y degrada la plataforma.</a:t>
             </a:r>
           </a:p>
         </p:txBody>
@@ -12053,7 +12053,7 @@
                 </a:solidFill>
                 <a:latin typeface="Segoe UI"/>
               </a:rPr>
-              <a:t>Respaldos automaticos</a:t>
+              <a:t>Respaldos automáticos</a:t>
             </a:r>
           </a:p>
           <a:p>
@@ -12072,7 +12072,7 @@
                 </a:solidFill>
                 <a:latin typeface="Segoe UI"/>
               </a:rPr>
-              <a:t>La base contiene la evidencia de capacitacion. Perderla es perder los certificados y la trazabilidad ante una auditoria.</a:t>
+              <a:t>La base contiene la evidencia de capacitación. Perderla es perder los certificados y la trazabilidad ante una auditoría.</a:t>
             </a:r>
           </a:p>
         </p:txBody>
@@ -12293,7 +12293,7 @@
                 </a:solidFill>
                 <a:latin typeface="Segoe UI"/>
               </a:rPr>
-              <a:t>Con ese tamano sobra holgadamente para el primer ano.</a:t>
+              <a:t>Con ese tamaño sobra holgadamente para el primer año.</a:t>
             </a:r>
           </a:p>
         </p:txBody>
@@ -12383,7 +12383,7 @@
                 </a:solidFill>
                 <a:latin typeface="Segoe UI"/>
               </a:rPr>
-              <a:t>El documento funcional de KG indica 'despliegue por medio de Hostinger'. Ese requisito se respeta en la recomendacion, pero conviene saber que plan de Hostinger sirve y cual no.</a:t>
+              <a:t>El documento funcional de KG indica 'despliegue por medio de Hostinger'. Ese requisito se respeta en la recomendación, pero conviene saber que plan de Hostinger sirve y cuál no.</a:t>
             </a:r>
           </a:p>
         </p:txBody>
@@ -12593,7 +12593,7 @@
                 </a:solidFill>
                 <a:latin typeface="Segoe UI"/>
               </a:rPr>
-              <a:t>Es el error mas comun y el mas caro de descubrir tarde. Aplica a Hostinger y a cualquier proveedor.</a:t>
+              <a:t>Es el error más comun y el más caro de descubrir tarde. Aplica a Hostinger y a cualquier proveedor.</a:t>
             </a:r>
           </a:p>
         </p:txBody>
@@ -12635,7 +12635,7 @@
                 </a:solidFill>
                 <a:latin typeface="Segoe UI"/>
               </a:rPr>
-              <a:t>KG Academy  ·  KG Gestion Integral S.A.S.  ·  Desarrollado por Diego Alejandro Hernandez Blanco</a:t>
+              <a:t>KG Academy  ·  KG Gestión Integral S.A.S.  ·  Desarrollado por Diego Alejandro Hernández Blanco</a:t>
             </a:r>
           </a:p>
         </p:txBody>
@@ -13038,7 +13038,7 @@
                 </a:solidFill>
                 <a:latin typeface="Segoe UI"/>
               </a:rPr>
-              <a:t>El proceso se reinicia o se suspende por limites de CPU y memoria.</a:t>
+              <a:t>El proceso se reinicia o se suspende por límites de CPU y memoria.</a:t>
             </a:r>
           </a:p>
         </p:txBody>
@@ -13210,7 +13210,7 @@
                 </a:solidFill>
                 <a:latin typeface="Segoe UI"/>
               </a:rPr>
-              <a:t>Si se sube la aplicacion como sitio estatico, dejan de funcionar el login, la base de datos y los certificados.</a:t>
+              <a:t>Si se sube la aplicación como sitio estático, dejan de funcionar el login, la base de datos y los certificados.</a:t>
             </a:r>
           </a:p>
         </p:txBody>
@@ -13657,7 +13657,7 @@
                 </a:solidFill>
                 <a:latin typeface="Segoe UI"/>
               </a:rPr>
-              <a:t>Cualquiera de las dos rutas cumple; cambian el costo y quien administra.</a:t>
+              <a:t>Cualquiera de las dos rutas cumple; cambian el costo y quién administra.</a:t>
             </a:r>
           </a:p>
         </p:txBody>
@@ -13747,7 +13747,7 @@
                 </a:solidFill>
                 <a:latin typeface="Segoe UI"/>
               </a:rPr>
-              <a:t>Si KG ya contrato un plan de hosting compartido en Hostinger, ese plan puede seguir usandose para el sitio corporativo y el correo, pero la plataforma necesita ademas un VPS.</a:t>
+              <a:t>Si KG ya contrato un plan de hosting compartido en Hostinger, ese plan puede seguir usandose para el sitio corporativo y el correo, pero la plataforma necesita además un VPS.</a:t>
             </a:r>
           </a:p>
         </p:txBody>
@@ -14089,7 +14089,7 @@
                 </a:solidFill>
                 <a:latin typeface="Segoe UI"/>
               </a:rPr>
-              <a:t>KG Academy  ·  KG Gestion Integral S.A.S.  ·  Desarrollado por Diego Alejandro Hernandez Blanco</a:t>
+              <a:t>KG Academy  ·  KG Gestión Integral S.A.S.  ·  Desarrollado por Diego Alejandro Hernández Blanco</a:t>
             </a:r>
           </a:p>
         </p:txBody>
@@ -14219,7 +14219,7 @@
                           </a:solidFill>
                           <a:latin typeface="Segoe UI"/>
                         </a:rPr>
-                        <a:t>Esfuerzo de administracion</a:t>
+                        <a:t>Esfuerzo de administración</a:t>
                       </a:r>
                     </a:p>
                   </a:txBody>
@@ -14687,7 +14687,7 @@
                           </a:solidFill>
                           <a:latin typeface="Segoe UI"/>
                         </a:rPr>
-                        <a:t>Cero administracion, ideal para Next.js, costo recurrente mayor</a:t>
+                        <a:t>Cero administración, ideal para Next.js, costo recurrente mayor</a:t>
                       </a:r>
                     </a:p>
                   </a:txBody>
@@ -14955,7 +14955,7 @@
                           </a:solidFill>
                           <a:latin typeface="Segoe UI"/>
                         </a:rPr>
-                        <a:t>Mismo esquema que el VPS de Hostinger, a veces mas potencia por el precio</a:t>
+                        <a:t>Mismo esquema que el VPS de Hostinger, a veces más potencia por el precio</a:t>
                       </a:r>
                     </a:p>
                   </a:txBody>
@@ -15089,7 +15089,7 @@
                           </a:solidFill>
                           <a:latin typeface="Segoe UI"/>
                         </a:rPr>
-                        <a:t>Requiere IP fija, UPS, seguridad fisica y soporte 24/7</a:t>
+                        <a:t>Requiere IP fija, UPS, seguridad física y soporte 24/7</a:t>
                       </a:r>
                     </a:p>
                   </a:txBody>
@@ -15189,7 +15189,7 @@
                 </a:solidFill>
                 <a:latin typeface="Segoe UI"/>
               </a:rPr>
-              <a:t>Los precios son ordenes de magnitud a 2026 y varian con promociones y plazo de contratacion. El costo del dominio (.co, aproximadamente US$ 25 al ano) es aparte en todas las opciones.</a:t>
+              <a:t>Los precios son ordenes de magnitud a 2026 y varian con promociones y plazo de contratacion. El costo del dominio (.co, aproximadamente US$ 25 al año) es aparte en todas las opciones.</a:t>
             </a:r>
           </a:p>
         </p:txBody>
@@ -15399,7 +15399,7 @@
                 </a:solidFill>
                 <a:latin typeface="Segoe UI"/>
               </a:rPr>
-              <a:t>Cinco criterios, ponderados segun la realidad de KG: una PYME que lanza su primer producto digital.</a:t>
+              <a:t>Cinco criterios, ponderados según la realidad de KG: una PYME que lanza su primer producto digital.</a:t>
             </a:r>
           </a:p>
         </p:txBody>
@@ -15441,7 +15441,7 @@
                 </a:solidFill>
                 <a:latin typeface="Segoe UI"/>
               </a:rPr>
-              <a:t>KG Academy  ·  KG Gestion Integral S.A.S.  ·  Desarrollado por Diego Alejandro Hernandez Blanco</a:t>
+              <a:t>KG Academy  ·  KG Gestión Integral S.A.S.  ·  Desarrollado por Diego Alejandro Hernández Blanco</a:t>
             </a:r>
           </a:p>
         </p:txBody>
@@ -15825,7 +15825,7 @@
                 </a:solidFill>
                 <a:latin typeface="Segoe UI"/>
               </a:rPr>
-              <a:t>Esfuerzo de administracion</a:t>
+              <a:t>Esfuerzo de administración</a:t>
             </a:r>
           </a:p>
           <a:p>
@@ -15844,7 +15844,7 @@
                 </a:solidFill>
                 <a:latin typeface="Segoe UI"/>
               </a:rPr>
-              <a:t>KG no tiene un area de sistemas dedicada al mantenimiento del servidor.</a:t>
+              <a:t>KG no tiene un área de sistemas dedicada al mantenimiento del servidor.</a:t>
             </a:r>
           </a:p>
         </p:txBody>
@@ -16260,7 +16260,7 @@
                 </a:solidFill>
                 <a:latin typeface="Segoe UI"/>
               </a:rPr>
-              <a:t>Poder migrar sin reescribir la aplicacion ni quedar atado al proveedor.</a:t>
+              <a:t>Poder migrar sin reescribir la aplicación ni quedar atado al proveedor.</a:t>
             </a:r>
           </a:p>
         </p:txBody>
@@ -16468,7 +16468,7 @@
                 </a:solidFill>
                 <a:latin typeface="Segoe UI"/>
               </a:rPr>
-              <a:t>Elegir el centro de datos mas cercano disponible marca la diferencia.</a:t>
+              <a:t>Elegir el centro de datos más cercano disponible marca la diferencia.</a:t>
             </a:r>
           </a:p>
         </p:txBody>
@@ -16630,7 +16630,7 @@
                 </a:solidFill>
                 <a:latin typeface="Segoe UI"/>
               </a:rPr>
-              <a:t>El VPS de Hostinger gana porque es el unico que satisface a la vez los tres criterios de mayor peso: es el mas economico de los viables, respeta el requisito del documento y no ata la plataforma a un proveedor.</a:t>
+              <a:t>El VPS de Hostinger gana porque es el único que satisface a la vez los tres criterios de mayor peso: es el más economico de los viables, respeta el requisito del documento y no ata la plataforma a un proveedor.</a:t>
             </a:r>
           </a:p>
           <a:p>
@@ -16649,7 +16649,7 @@
                 </a:solidFill>
                 <a:latin typeface="Segoe UI"/>
               </a:rPr>
-              <a:t>Su unica debilidad es el esfuerzo de administracion, y se compensa dejando el servidor configurado, documentado y con respaldos automaticos desde el primer dia.</a:t>
+              <a:t>Su única debilidad es el esfuerzo de administración, y se compensa dejando el servidor configurado, documentado y con respaldos automáticos desde el primer día.</a:t>
             </a:r>
           </a:p>
         </p:txBody>
@@ -16739,7 +16739,7 @@
                 </a:solidFill>
                 <a:latin typeface="Segoe UI"/>
               </a:rPr>
-              <a:t>Si KG prefiere no administrar ningun servidor, la segunda opcion es Vercel + Neon: cuesta aproximadamente el doble al mes pero elimina por completo el mantenimiento.</a:t>
+              <a:t>Si KG prefiere no administrar ningún servidor, la segunda opcion es Vercel + Neon: cuesta aproximadamente el doble al mes pero elimina por completo el mantenimiento.</a:t>
             </a:r>
           </a:p>
         </p:txBody>
@@ -16911,7 +16911,7 @@
                 </a:solidFill>
                 <a:latin typeface="Segoe UI"/>
               </a:rPr>
-              <a:t>RECOMENDACION</a:t>
+              <a:t>RECOMENDACIÓN</a:t>
             </a:r>
           </a:p>
           <a:p>
@@ -16949,7 +16949,7 @@
                 </a:solidFill>
                 <a:latin typeface="Segoe UI"/>
               </a:rPr>
-              <a:t>Hostinger VPS KVM 2, centro de datos mas cercano disponible (EE.UU. este o Sao Paulo).</a:t>
+              <a:t>Hostinger VPS KVM 2, centro de datos más cercano disponible (EE.UU. este o Sao Paulo).</a:t>
             </a:r>
           </a:p>
         </p:txBody>
@@ -16991,7 +16991,7 @@
                 </a:solidFill>
                 <a:latin typeface="Segoe UI"/>
               </a:rPr>
-              <a:t>KG Academy  ·  KG Gestion Integral S.A.S.  ·  Desarrollado por Diego Alejandro Hernandez Blanco</a:t>
+              <a:t>KG Academy  ·  KG Gestión Integral S.A.S.  ·  Desarrollado por Diego Alejandro Hernández Blanco</a:t>
             </a:r>
           </a:p>
         </p:txBody>
@@ -17381,7 +17381,7 @@
                 </a:solidFill>
                 <a:latin typeface="Segoe UI"/>
               </a:rPr>
-              <a:t>kgacademy.co  ·  certificado Let's Encrypt con renovacion automatica</a:t>
+              <a:t>kgacademy.co  ·  certificado Let's Encrypt con renovacion automática</a:t>
             </a:r>
           </a:p>
         </p:txBody>
@@ -17687,7 +17687,7 @@
                 </a:solidFill>
                 <a:latin typeface="Segoe UI"/>
               </a:rPr>
-              <a:t>APLICACION</a:t>
+              <a:t>APLICACIÓN</a:t>
             </a:r>
           </a:p>
         </p:txBody>
@@ -17729,7 +17729,7 @@
                 </a:solidFill>
                 <a:latin typeface="Segoe UI"/>
               </a:rPr>
-              <a:t>Next.js en produccion  ·  proceso Node gestionado por PM2  ·  reinicio automatico</a:t>
+              <a:t>Next.js en producción  ·  proceso Node gestionado por PM2  ·  reinicio automático</a:t>
             </a:r>
           </a:p>
         </p:txBody>
@@ -18077,7 +18077,7 @@
                 </a:solidFill>
                 <a:latin typeface="Segoe UI"/>
               </a:rPr>
-              <a:t>pg_dump diario por cron  ·  retencion 30 dias  ·  copia fuera del servidor</a:t>
+              <a:t>pg_dump diario por cron  ·  retencion 30 días  ·  copia fuera del servidor</a:t>
             </a:r>
           </a:p>
         </p:txBody>
@@ -18815,7 +18815,7 @@
                 </a:solidFill>
                 <a:latin typeface="Segoe UI"/>
               </a:rPr>
-              <a:t>PostgreSQL escuchando solo en localhost es una decision de seguridad deliberada: la base nunca queda expuesta a internet, solo la alcanza la aplicacion que corre en el mismo servidor.</a:t>
+              <a:t>PostgreSQL escuchando solo en localhost es una decision de seguridad deliberada: la base nunca queda expuesta a internet, solo la alcanza la aplicación que corre en el mismo servidor.</a:t>
             </a:r>
           </a:p>
         </p:txBody>
@@ -19067,7 +19067,7 @@
                 </a:solidFill>
                 <a:latin typeface="Segoe UI"/>
               </a:rPr>
-              <a:t>KG Academy  ·  KG Gestion Integral S.A.S.  ·  Desarrollado por Diego Alejandro Hernandez Blanco</a:t>
+              <a:t>KG Academy  ·  KG Gestión Integral S.A.S.  ·  Desarrollado por Diego Alejandro Hernández Blanco</a:t>
             </a:r>
           </a:p>
         </p:txBody>
@@ -19307,7 +19307,7 @@
                           </a:solidFill>
                           <a:latin typeface="Segoe UI"/>
                         </a:rPr>
-                        <a:t>Servidor de aplicacion y base de datos</a:t>
+                        <a:t>Servidor de aplicación y base de datos</a:t>
                       </a:r>
                     </a:p>
                   </a:txBody>
@@ -19397,7 +19397,7 @@
                           </a:solidFill>
                           <a:latin typeface="Segoe UI"/>
                         </a:rPr>
-                        <a:t>Alojamiento de la aplicacion sin administracion</a:t>
+                        <a:t>Alojamiento de la aplicación sin administración</a:t>
                       </a:r>
                     </a:p>
                   </a:txBody>
@@ -19487,7 +19487,7 @@
                           </a:solidFill>
                           <a:latin typeface="Segoe UI"/>
                         </a:rPr>
-                        <a:t>Base de datos con respaldos automaticos</a:t>
+                        <a:t>Base de datos con respaldos automáticos</a:t>
                       </a:r>
                     </a:p>
                   </a:txBody>
@@ -19533,7 +19533,7 @@
                           </a:solidFill>
                           <a:latin typeface="Segoe UI"/>
                         </a:rPr>
-                        <a:t>US$ 2 (25 al ano)</a:t>
+                        <a:t>US$ 2 (25 al año)</a:t>
                       </a:r>
                     </a:p>
                   </a:txBody>
@@ -19555,7 +19555,7 @@
                           </a:solidFill>
                           <a:latin typeface="Segoe UI"/>
                         </a:rPr>
-                        <a:t>US$ 2 (25 al ano)</a:t>
+                        <a:t>US$ 2 (25 al año)</a:t>
                       </a:r>
                     </a:p>
                   </a:txBody>
@@ -19757,7 +19757,7 @@
                           </a:solidFill>
                           <a:latin typeface="Segoe UI"/>
                         </a:rPr>
-                        <a:t>Vimeo o Bunny Stream segun consumo</a:t>
+                        <a:t>Vimeo o Bunny Stream según consumo</a:t>
                       </a:r>
                     </a:p>
                   </a:txBody>
@@ -20127,7 +20127,7 @@
                 </a:solidFill>
                 <a:latin typeface="Segoe UI"/>
               </a:rPr>
-              <a:t>La diferencia real entre las dos rutas no es el dinero, es el tiempo: la ruta A exige unas 2 horas al mes de mantenimiento (actualizaciones y revision de respaldos); la ruta B, practicamente ninguna.</a:t>
+              <a:t>La diferencia real entre las dos rutas no es el dinero, es el tiempo: la ruta A exige unas 2 horas al mes de mantenimiento (actualizaciones y revisión de respaldos); la ruta B, practicamente ninguna.</a:t>
             </a:r>
           </a:p>
         </p:txBody>
@@ -20337,7 +20337,7 @@
                 </a:solidFill>
                 <a:latin typeface="Segoe UI"/>
               </a:rPr>
-              <a:t>Es la decision tecnica que mas impacta el costo y la experiencia. Merece analisis propio.</a:t>
+              <a:t>Es la decision técnica que más impacta el costo y la experiencia. Merece análisis propio.</a:t>
             </a:r>
           </a:p>
         </p:txBody>
@@ -20379,7 +20379,7 @@
                 </a:solidFill>
                 <a:latin typeface="Segoe UI"/>
               </a:rPr>
-              <a:t>KG Academy  ·  KG Gestion Integral S.A.S.  ·  Desarrollado por Diego Alejandro Hernandez Blanco</a:t>
+              <a:t>KG Academy  ·  KG Gestión Integral S.A.S.  ·  Desarrollado por Diego Alejandro Hernández Blanco</a:t>
             </a:r>
           </a:p>
         </p:txBody>
@@ -21345,7 +21345,7 @@
                 </a:solidFill>
                 <a:latin typeface="Segoe UI"/>
               </a:rPr>
-              <a:t>Muy economico, se paga por consumo real, red de distribucion rapida en Latinoamerica y reproductor propio.</a:t>
+              <a:t>Muy economico, se paga por consumo real, red de distribución rápida en Latinoamerica y reproductor propio.</a:t>
             </a:r>
           </a:p>
         </p:txBody>
@@ -21666,7 +21666,7 @@
                 </a:solidFill>
                 <a:latin typeface="Segoe UI"/>
               </a:rPr>
-              <a:t>La plataforma ya soporta las cuatro opciones: en el constructor se elige el tipo de contenido y se pega la URL. Cambiar de proveedor de video mas adelante no exige tocar el codigo.</a:t>
+              <a:t>La plataforma ya soporta las cuatro opciones: en el constructor se elige el tipo de contenido y se pega la URL. Cambiar de proveedor de video más adelante no exige tocar el código.</a:t>
             </a:r>
           </a:p>
         </p:txBody>
@@ -21876,7 +21876,7 @@
                 </a:solidFill>
                 <a:latin typeface="Segoe UI"/>
               </a:rPr>
-              <a:t>Dos temas que suelen olvidarse hasta que hay una auditoria o una perdida de informacion.</a:t>
+              <a:t>Dos temas que suelen olvidarse hasta que hay una auditoría o una perdida de información.</a:t>
             </a:r>
           </a:p>
         </p:txBody>
@@ -21918,7 +21918,7 @@
                 </a:solidFill>
                 <a:latin typeface="Segoe UI"/>
               </a:rPr>
-              <a:t>KG Academy  ·  KG Gestion Integral S.A.S.  ·  Desarrollado por Diego Alejandro Hernandez Blanco</a:t>
+              <a:t>KG Academy  ·  KG Gestión Integral S.A.S.  ·  Desarrollado por Diego Alejandro Hernández Blanco</a:t>
             </a:r>
           </a:p>
         </p:txBody>
@@ -22063,7 +22063,7 @@
                 </a:solidFill>
                 <a:latin typeface="Segoe UI"/>
               </a:rPr>
-              <a:t>PROTECCION DE DATOS  ·  LEY 1581 DE 2012</a:t>
+              <a:t>PROTECCIÓN DE DATOS  ·  LEY 1581 DE 2012</a:t>
             </a:r>
           </a:p>
         </p:txBody>
@@ -22820,7 +22820,7 @@
                 </a:solidFill>
                 <a:latin typeface="Segoe UI"/>
               </a:rPr>
-              <a:t>pg_dump automatico a la 1:00 a.m., comprimido.</a:t>
+              <a:t>pg_dump automático a la 1:00 a.m., comprimido.</a:t>
             </a:r>
           </a:p>
         </p:txBody>
@@ -23436,7 +23436,7 @@
                 </a:solidFill>
                 <a:latin typeface="Segoe UI"/>
               </a:rPr>
-              <a:t>Sin respaldos, perder la base significa perder los certificados emitidos y toda la trazabilidad de capacitacion que la empresa debe demostrar ante la ARL.</a:t>
+              <a:t>Sin respaldos, perder la base significa perder los certificados emitidos y toda la trazabilidad de capacitación que la empresa debe demostrar ante la ARL.</a:t>
             </a:r>
           </a:p>
         </p:txBody>
